--- a/skills/subskills/hnu-digital-circuit-seminar-ppt/assets/template.pptx
+++ b/skills/subskills/hnu-digital-circuit-seminar-ppt/assets/template.pptx
@@ -213,7 +213,7 @@
           <a:p>
             <a:fld id="{167A461E-01D6-449C-AAB7-D13A3F710014}" type="datetimeFigureOut">
               <a:rPr lang="zh-CN" altLang="en-US" smtClean="0"/>
-              <a:t>2026/10/22</a:t>
+              <a:t>2026/10/23</a:t>
             </a:fld>
             <a:endParaRPr lang="zh-CN" altLang="en-US"/>
           </a:p>
@@ -809,7 +809,7 @@
           <a:p>
             <a:fld id="{13D0CE79-49FB-443D-BEF8-6B709DE8FD0C}" type="datetimeFigureOut">
               <a:rPr lang="zh-CN" altLang="en-US" smtClean="0"/>
-              <a:t>2026/10/22</a:t>
+              <a:t>2026/10/23</a:t>
             </a:fld>
             <a:endParaRPr lang="zh-CN" altLang="en-US"/>
           </a:p>
@@ -997,7 +997,7 @@
           <a:p>
             <a:fld id="{13D0CE79-49FB-443D-BEF8-6B709DE8FD0C}" type="datetimeFigureOut">
               <a:rPr lang="zh-CN" altLang="en-US" smtClean="0"/>
-              <a:t>2026/10/22</a:t>
+              <a:t>2026/10/23</a:t>
             </a:fld>
             <a:endParaRPr lang="zh-CN" altLang="en-US"/>
           </a:p>
@@ -1613,7 +1613,7 @@
           <a:p>
             <a:fld id="{13D0CE79-49FB-443D-BEF8-6B709DE8FD0C}" type="datetimeFigureOut">
               <a:rPr lang="zh-CN" altLang="en-US" smtClean="0"/>
-              <a:t>2026/10/22</a:t>
+              <a:t>2026/10/23</a:t>
             </a:fld>
             <a:endParaRPr lang="zh-CN" altLang="en-US"/>
           </a:p>
@@ -2233,7 +2233,7 @@
           <a:p>
             <a:fld id="{13D0CE79-49FB-443D-BEF8-6B709DE8FD0C}" type="datetimeFigureOut">
               <a:rPr lang="zh-CN" altLang="en-US" smtClean="0"/>
-              <a:t>2026/10/22</a:t>
+              <a:t>2026/10/23</a:t>
             </a:fld>
             <a:endParaRPr lang="zh-CN" altLang="en-US"/>
           </a:p>
@@ -2988,7 +2988,7 @@
           <a:p>
             <a:fld id="{C9E60F58-3108-4415-857A-6D0360DF626E}" type="datetimeFigureOut">
               <a:rPr lang="zh-CN" altLang="en-US" smtClean="0"/>
-              <a:t>2026/10/22</a:t>
+              <a:t>2026/10/23</a:t>
             </a:fld>
             <a:endParaRPr lang="zh-CN" altLang="en-US"/>
           </a:p>
@@ -3494,7 +3494,7 @@
           <a:p>
             <a:fld id="{13D0CE79-49FB-443D-BEF8-6B709DE8FD0C}" type="datetimeFigureOut">
               <a:rPr lang="zh-CN" altLang="en-US" smtClean="0"/>
-              <a:t>2026/10/22</a:t>
+              <a:t>2026/10/23</a:t>
             </a:fld>
             <a:endParaRPr lang="zh-CN" altLang="en-US"/>
           </a:p>
@@ -3863,7 +3863,7 @@
           <a:p>
             <a:fld id="{13D0CE79-49FB-443D-BEF8-6B709DE8FD0C}" type="datetimeFigureOut">
               <a:rPr lang="zh-CN" altLang="en-US" smtClean="0"/>
-              <a:t>2026/10/22</a:t>
+              <a:t>2026/10/23</a:t>
             </a:fld>
             <a:endParaRPr lang="zh-CN" altLang="en-US"/>
           </a:p>
@@ -4148,7 +4148,7 @@
           <a:p>
             <a:fld id="{13D0CE79-49FB-443D-BEF8-6B709DE8FD0C}" type="datetimeFigureOut">
               <a:rPr lang="zh-CN" altLang="en-US" smtClean="0"/>
-              <a:t>2026/10/22</a:t>
+              <a:t>2026/10/23</a:t>
             </a:fld>
             <a:endParaRPr lang="zh-CN" altLang="en-US"/>
           </a:p>
@@ -4413,7 +4413,7 @@
           <a:p>
             <a:fld id="{13D0CE79-49FB-443D-BEF8-6B709DE8FD0C}" type="datetimeFigureOut">
               <a:rPr lang="zh-CN" altLang="en-US" smtClean="0"/>
-              <a:t>2026/10/22</a:t>
+              <a:t>2026/10/23</a:t>
             </a:fld>
             <a:endParaRPr lang="zh-CN" altLang="en-US"/>
           </a:p>
@@ -4591,7 +4591,7 @@
           <a:p>
             <a:fld id="{13D0CE79-49FB-443D-BEF8-6B709DE8FD0C}" type="datetimeFigureOut">
               <a:rPr lang="zh-CN" altLang="en-US" smtClean="0"/>
-              <a:t>2026/10/22</a:t>
+              <a:t>2026/10/23</a:t>
             </a:fld>
             <a:endParaRPr lang="zh-CN" altLang="en-US"/>
           </a:p>
@@ -4787,7 +4787,7 @@
           <a:p>
             <a:fld id="{13D0CE79-49FB-443D-BEF8-6B709DE8FD0C}" type="datetimeFigureOut">
               <a:rPr lang="zh-CN" altLang="en-US" smtClean="0"/>
-              <a:t>2026/10/22</a:t>
+              <a:t>2026/10/23</a:t>
             </a:fld>
             <a:endParaRPr lang="zh-CN" altLang="en-US"/>
           </a:p>
@@ -7614,56 +7614,6 @@
               </a:rPr>
               <a:t>第三部分</a:t>
             </a:r>
-          </a:p>
-        </p:txBody>
-      </p:sp>
-      <p:sp>
-        <p:nvSpPr>
-          <p:cNvPr id="11" name="矩形 10">
-            <a:extLst>
-              <a:ext uri="{FF2B5EF4-FFF2-40B4-BE49-F238E27FC236}">
-                <a16:creationId xmlns:a16="http://schemas.microsoft.com/office/drawing/2014/main" id="{0111E396-C1E4-4345-CB46-D68A7E8CE122}"/>
-              </a:ext>
-            </a:extLst>
-          </p:cNvPr>
-          <p:cNvSpPr/>
-          <p:nvPr/>
-        </p:nvSpPr>
-        <p:spPr>
-          <a:xfrm>
-            <a:off x="390938" y="5522509"/>
-            <a:ext cx="11522767" cy="1090326"/>
-          </a:xfrm>
-          <a:prstGeom prst="rect">
-            <a:avLst/>
-          </a:prstGeom>
-          <a:solidFill>
-            <a:srgbClr val="FFFFEF"/>
-          </a:solidFill>
-          <a:ln>
-            <a:noFill/>
-          </a:ln>
-        </p:spPr>
-        <p:style>
-          <a:lnRef idx="1">
-            <a:schemeClr val="accent1"/>
-          </a:lnRef>
-          <a:fillRef idx="2">
-            <a:schemeClr val="accent1"/>
-          </a:fillRef>
-          <a:effectRef idx="1">
-            <a:schemeClr val="accent1"/>
-          </a:effectRef>
-          <a:fontRef idx="minor">
-            <a:schemeClr val="dk1"/>
-          </a:fontRef>
-        </p:style>
-        <p:txBody>
-          <a:bodyPr rtlCol="0" anchor="ctr"/>
-          <a:lstStyle/>
-          <a:p>
-            <a:pPr algn="ctr"/>
-            <a:endParaRPr lang="zh-CN" altLang="en-US"/>
           </a:p>
         </p:txBody>
       </p:sp>
